--- a/dist/초3/영어/소리와문자/초3_영어_소리와문자_04_자음글자의소리.pptx
+++ b/dist/초3/영어/소리와문자/초3_영어_소리와문자_04_자음글자의소리.pptx
@@ -124,13 +124,13 @@
   <p:extLst>
     <p:ext uri="{521415D9-36F7-43E2-AB2F-B90AF26B5E84}">
       <p14:sectionLst xmlns:p14="http://schemas.microsoft.com/office/powerpoint/2010/main">
-        <p14:section name="도입" id="{dc30aeb0-87bd-117e-0b06-8f65a7c7e7d5}">
+        <p14:section name="도입" id="{1d985b4f-6c4a-106e-44c5-ec58fcb96c0c}">
           <p14:sldIdLst>
             <p14:sldId id="256"/>
             <p14:sldId id="257"/>
           </p14:sldIdLst>
         </p14:section>
-        <p14:section name="개념" id="{4980d4d3-f249-a22d-63a7-cc7280021c3b}">
+        <p14:section name="개념" id="{5c82aa4a-4122-5c15-f5e6-c9c86af206e3}">
           <p14:sldIdLst>
             <p14:sldId id="258"/>
             <p14:sldId id="259"/>
@@ -142,32 +142,32 @@
             <p14:sldId id="267"/>
           </p14:sldIdLst>
         </p14:section>
-        <p14:section name="연습" id="{1fcccc2b-fd54-f5cf-2722-fe21960e0a59}">
+        <p14:section name="연습" id="{30208379-79ed-72f9-1554-ef8f8cd42049}">
           <p14:sldIdLst>
             <p14:sldId id="265"/>
             <p14:sldId id="266"/>
             <p14:sldId id="268"/>
           </p14:sldIdLst>
         </p14:section>
-        <p14:section name="개념" id="{070d4d5c-e6a8-9355-bd62-49b0f114bc70}">
+        <p14:section name="개념" id="{77db6bbb-8836-9f75-0f67-3de65dbf43f4}">
           <p14:sldIdLst/>
         </p14:section>
-        <p14:section name="연습" id="{bbfefd43-d6f5-5822-d586-1c91e1928091}">
+        <p14:section name="연습" id="{298f095e-6590-9483-e382-8c9ee4b0ad87}">
           <p14:sldIdLst/>
         </p14:section>
-        <p14:section name="확인" id="{59434d27-0b75-1d77-9d72-59825a5e24dd}">
+        <p14:section name="확인" id="{dc4ee945-f506-b807-fa5a-d941d11d5b99}">
           <p14:sldIdLst>
             <p14:sldId id="269"/>
             <p14:sldId id="270"/>
             <p14:sldId id="271"/>
           </p14:sldIdLst>
         </p14:section>
-        <p14:section name="정리" id="{88e57a50-b5ec-cb8e-3a64-e4deac5bc0f6}">
+        <p14:section name="정리" id="{2492c073-2cc4-4d03-b986-5ba261d06699}">
           <p14:sldIdLst>
             <p14:sldId id="272"/>
           </p14:sldIdLst>
         </p14:section>
-        <p14:section name="보충" id="{5c136957-ace2-fe5b-2ff2-5af5e31f3e8e}">
+        <p14:section name="보충" id="{a99454fb-d5d8-659c-67f9-3e41621aad5a}">
           <p14:sldIdLst>
             <p14:sldId id="273"/>
           </p14:sldIdLst>

--- a/dist/초3/영어/소리와문자/초3_영어_소리와문자_04_자음글자의소리.pptx
+++ b/dist/초3/영어/소리와문자/초3_영어_소리와문자_04_자음글자의소리.pptx
@@ -124,13 +124,13 @@
   <p:extLst>
     <p:ext uri="{521415D9-36F7-43E2-AB2F-B90AF26B5E84}">
       <p14:sectionLst xmlns:p14="http://schemas.microsoft.com/office/powerpoint/2010/main">
-        <p14:section name="도입" id="{1d985b4f-6c4a-106e-44c5-ec58fcb96c0c}">
+        <p14:section name="도입" id="{0616f9df-da2a-5870-344d-102e4cb4de04}">
           <p14:sldIdLst>
             <p14:sldId id="256"/>
             <p14:sldId id="257"/>
           </p14:sldIdLst>
         </p14:section>
-        <p14:section name="개념" id="{5c82aa4a-4122-5c15-f5e6-c9c86af206e3}">
+        <p14:section name="개념" id="{ef6c5396-c86a-437b-738f-aea9c61829ac}">
           <p14:sldIdLst>
             <p14:sldId id="258"/>
             <p14:sldId id="259"/>
@@ -142,32 +142,32 @@
             <p14:sldId id="267"/>
           </p14:sldIdLst>
         </p14:section>
-        <p14:section name="연습" id="{30208379-79ed-72f9-1554-ef8f8cd42049}">
+        <p14:section name="연습" id="{ad7c2c6a-c6a8-a227-8cee-d57a6b2027fc}">
           <p14:sldIdLst>
             <p14:sldId id="265"/>
             <p14:sldId id="266"/>
             <p14:sldId id="268"/>
           </p14:sldIdLst>
         </p14:section>
-        <p14:section name="개념" id="{77db6bbb-8836-9f75-0f67-3de65dbf43f4}">
+        <p14:section name="개념" id="{8785f51d-6497-5a2f-cece-d35388cc684f}">
           <p14:sldIdLst/>
         </p14:section>
-        <p14:section name="연습" id="{298f095e-6590-9483-e382-8c9ee4b0ad87}">
+        <p14:section name="연습" id="{62166afa-62a8-e4ec-4d55-8964c46f40a7}">
           <p14:sldIdLst/>
         </p14:section>
-        <p14:section name="확인" id="{dc4ee945-f506-b807-fa5a-d941d11d5b99}">
+        <p14:section name="확인" id="{df1c2dff-49d9-7d99-b649-fe8f4e0d2e43}">
           <p14:sldIdLst>
             <p14:sldId id="269"/>
             <p14:sldId id="270"/>
             <p14:sldId id="271"/>
           </p14:sldIdLst>
         </p14:section>
-        <p14:section name="정리" id="{2492c073-2cc4-4d03-b986-5ba261d06699}">
+        <p14:section name="정리" id="{e1f1f409-ecce-100b-c609-19f17c9fda13}">
           <p14:sldIdLst>
             <p14:sldId id="272"/>
           </p14:sldIdLst>
         </p14:section>
-        <p14:section name="보충" id="{a99454fb-d5d8-659c-67f9-3e41621aad5a}">
+        <p14:section name="보충" id="{37f930a7-b4d8-ea89-c0e8-ff460c52e97e}">
           <p14:sldIdLst>
             <p14:sldId id="273"/>
           </p14:sldIdLst>
